--- a/livro_ia_educacao/saida/pptx/Cap03_slides.pptx
+++ b/livro_ia_educacao/saida/pptx/Cap03_slides.pptx
@@ -8736,11 +8736,11 @@
         <p:spPr>
           <a:xfrm>
             <a:off x="548640" y="1417320"/>
-            <a:ext cx="11064240" cy="762000"/>
+            <a:ext cx="11064240" cy="682752"/>
           </a:xfrm>
           <a:prstGeom prst="roundRect">
             <a:avLst>
-              <a:gd name="adj" fmla="val 14400"/>
+              <a:gd name="adj" fmla="val 16071"/>
             </a:avLst>
           </a:prstGeom>
           <a:solidFill>
@@ -8767,7 +8767,7 @@
         <p:spPr>
           <a:xfrm>
             <a:off x="731520" y="1417320"/>
-            <a:ext cx="548640" cy="762000"/>
+            <a:ext cx="548640" cy="682752"/>
           </a:xfrm>
           <a:prstGeom prst="rect">
             <a:avLst/>
@@ -8803,7 +8803,7 @@
         <p:spPr>
           <a:xfrm>
             <a:off x="1463040" y="1417320"/>
-            <a:ext cx="9966960" cy="762000"/>
+            <a:ext cx="9966960" cy="682752"/>
           </a:xfrm>
           <a:prstGeom prst="rect">
             <a:avLst/>
@@ -8838,12 +8838,12 @@
         </p:nvSpPr>
         <p:spPr>
           <a:xfrm>
-            <a:off x="548640" y="2289048"/>
-            <a:ext cx="11064240" cy="762000"/>
+            <a:off x="548640" y="2209800"/>
+            <a:ext cx="11064240" cy="682752"/>
           </a:xfrm>
           <a:prstGeom prst="roundRect">
             <a:avLst>
-              <a:gd name="adj" fmla="val 14400"/>
+              <a:gd name="adj" fmla="val 16071"/>
             </a:avLst>
           </a:prstGeom>
           <a:solidFill>
@@ -8869,8 +8869,8 @@
         </p:nvSpPr>
         <p:spPr>
           <a:xfrm>
-            <a:off x="731520" y="2289048"/>
-            <a:ext cx="548640" cy="762000"/>
+            <a:off x="731520" y="2209800"/>
+            <a:ext cx="548640" cy="682752"/>
           </a:xfrm>
           <a:prstGeom prst="rect">
             <a:avLst/>
@@ -8905,8 +8905,8 @@
         </p:nvSpPr>
         <p:spPr>
           <a:xfrm>
-            <a:off x="1463040" y="2289048"/>
-            <a:ext cx="9966960" cy="762000"/>
+            <a:off x="1463040" y="2209800"/>
+            <a:ext cx="9966960" cy="682752"/>
           </a:xfrm>
           <a:prstGeom prst="rect">
             <a:avLst/>
@@ -8941,12 +8941,12 @@
         </p:nvSpPr>
         <p:spPr>
           <a:xfrm>
-            <a:off x="548640" y="3160776"/>
-            <a:ext cx="11064240" cy="762000"/>
+            <a:off x="548640" y="3002280"/>
+            <a:ext cx="11064240" cy="682752"/>
           </a:xfrm>
           <a:prstGeom prst="roundRect">
             <a:avLst>
-              <a:gd name="adj" fmla="val 14400"/>
+              <a:gd name="adj" fmla="val 16071"/>
             </a:avLst>
           </a:prstGeom>
           <a:solidFill>
@@ -8972,8 +8972,8 @@
         </p:nvSpPr>
         <p:spPr>
           <a:xfrm>
-            <a:off x="731520" y="3160776"/>
-            <a:ext cx="548640" cy="762000"/>
+            <a:off x="731520" y="3002280"/>
+            <a:ext cx="548640" cy="682752"/>
           </a:xfrm>
           <a:prstGeom prst="rect">
             <a:avLst/>
@@ -9008,8 +9008,8 @@
         </p:nvSpPr>
         <p:spPr>
           <a:xfrm>
-            <a:off x="1463040" y="3160776"/>
-            <a:ext cx="9966960" cy="762000"/>
+            <a:off x="1463040" y="3002280"/>
+            <a:ext cx="9966960" cy="682752"/>
           </a:xfrm>
           <a:prstGeom prst="rect">
             <a:avLst/>
@@ -9044,12 +9044,12 @@
         </p:nvSpPr>
         <p:spPr>
           <a:xfrm>
-            <a:off x="548640" y="4032504"/>
-            <a:ext cx="11064240" cy="762000"/>
+            <a:off x="548640" y="3794760"/>
+            <a:ext cx="11064240" cy="682752"/>
           </a:xfrm>
           <a:prstGeom prst="roundRect">
             <a:avLst>
-              <a:gd name="adj" fmla="val 14400"/>
+              <a:gd name="adj" fmla="val 16071"/>
             </a:avLst>
           </a:prstGeom>
           <a:solidFill>
@@ -9075,8 +9075,8 @@
         </p:nvSpPr>
         <p:spPr>
           <a:xfrm>
-            <a:off x="731520" y="4032504"/>
-            <a:ext cx="548640" cy="762000"/>
+            <a:off x="731520" y="3794760"/>
+            <a:ext cx="548640" cy="682752"/>
           </a:xfrm>
           <a:prstGeom prst="rect">
             <a:avLst/>
@@ -9111,8 +9111,8 @@
         </p:nvSpPr>
         <p:spPr>
           <a:xfrm>
-            <a:off x="1463040" y="4032504"/>
-            <a:ext cx="9966960" cy="762000"/>
+            <a:off x="1463040" y="3794760"/>
+            <a:ext cx="9966960" cy="682752"/>
           </a:xfrm>
           <a:prstGeom prst="rect">
             <a:avLst/>
@@ -9147,12 +9147,12 @@
         </p:nvSpPr>
         <p:spPr>
           <a:xfrm>
-            <a:off x="548640" y="4904232"/>
-            <a:ext cx="11064240" cy="762000"/>
+            <a:off x="548640" y="4587240"/>
+            <a:ext cx="11064240" cy="682752"/>
           </a:xfrm>
           <a:prstGeom prst="roundRect">
             <a:avLst>
-              <a:gd name="adj" fmla="val 14400"/>
+              <a:gd name="adj" fmla="val 16071"/>
             </a:avLst>
           </a:prstGeom>
           <a:solidFill>
@@ -9178,8 +9178,8 @@
         </p:nvSpPr>
         <p:spPr>
           <a:xfrm>
-            <a:off x="731520" y="4904232"/>
-            <a:ext cx="548640" cy="762000"/>
+            <a:off x="731520" y="4587240"/>
+            <a:ext cx="548640" cy="682752"/>
           </a:xfrm>
           <a:prstGeom prst="rect">
             <a:avLst/>
@@ -9214,8 +9214,8 @@
         </p:nvSpPr>
         <p:spPr>
           <a:xfrm>
-            <a:off x="1463040" y="4904232"/>
-            <a:ext cx="9966960" cy="762000"/>
+            <a:off x="1463040" y="4587240"/>
+            <a:ext cx="9966960" cy="682752"/>
           </a:xfrm>
           <a:prstGeom prst="rect">
             <a:avLst/>
@@ -9250,12 +9250,12 @@
         </p:nvSpPr>
         <p:spPr>
           <a:xfrm>
-            <a:off x="548640" y="5775960"/>
-            <a:ext cx="11064240" cy="762000"/>
+            <a:off x="548640" y="5379720"/>
+            <a:ext cx="11064240" cy="682752"/>
           </a:xfrm>
           <a:prstGeom prst="roundRect">
             <a:avLst>
-              <a:gd name="adj" fmla="val 14400"/>
+              <a:gd name="adj" fmla="val 16071"/>
             </a:avLst>
           </a:prstGeom>
           <a:solidFill>
@@ -9281,8 +9281,8 @@
         </p:nvSpPr>
         <p:spPr>
           <a:xfrm>
-            <a:off x="731520" y="5775960"/>
-            <a:ext cx="548640" cy="762000"/>
+            <a:off x="731520" y="5379720"/>
+            <a:ext cx="548640" cy="682752"/>
           </a:xfrm>
           <a:prstGeom prst="rect">
             <a:avLst/>
@@ -9317,8 +9317,8 @@
         </p:nvSpPr>
         <p:spPr>
           <a:xfrm>
-            <a:off x="1463040" y="5775960"/>
-            <a:ext cx="9966960" cy="762000"/>
+            <a:off x="1463040" y="5379720"/>
+            <a:ext cx="9966960" cy="682752"/>
           </a:xfrm>
           <a:prstGeom prst="rect">
             <a:avLst/>
